--- a/docs/licenta/Prezentare_Licenta_2025_Horovei_Dumitru_10LF222.pptx
+++ b/docs/licenta/Prezentare_Licenta_2025_Horovei_Dumitru_10LF222.pptx
@@ -4167,10 +4167,10 @@
       </p:sp>
       <p:grpSp>
         <p:nvGrpSpPr>
-          <p:cNvPr id="3" name="Group 2">
-            <a:extLst>
-              <a:ext uri="{FF2B5EF4-FFF2-40B4-BE49-F238E27FC236}">
-                <a16:creationId xmlns:a16="http://schemas.microsoft.com/office/drawing/2014/main" id="{5FD3A92F-0142-EFE6-CBC0-BDF2AF9E98C4}"/>
+          <p:cNvPr id="6" name="Group 5">
+            <a:extLst>
+              <a:ext uri="{FF2B5EF4-FFF2-40B4-BE49-F238E27FC236}">
+                <a16:creationId xmlns:a16="http://schemas.microsoft.com/office/drawing/2014/main" id="{E028A5DA-38FB-B6A0-E351-35C951DDDED3}"/>
               </a:ext>
             </a:extLst>
           </p:cNvPr>
@@ -4777,6 +4777,42 @@
             </a:prstGeom>
           </p:spPr>
         </p:pic>
+        <p:pic>
+          <p:nvPicPr>
+            <p:cNvPr id="5" name="Graphic 4">
+              <a:extLst>
+                <a:ext uri="{FF2B5EF4-FFF2-40B4-BE49-F238E27FC236}">
+                  <a16:creationId xmlns:a16="http://schemas.microsoft.com/office/drawing/2014/main" id="{E4553690-0779-FB61-149F-BA59EF8F213C}"/>
+                </a:ext>
+              </a:extLst>
+            </p:cNvPr>
+            <p:cNvPicPr>
+              <a:picLocks noChangeAspect="1"/>
+            </p:cNvPicPr>
+            <p:nvPr/>
+          </p:nvPicPr>
+          <p:blipFill>
+            <a:blip r:embed="rId18">
+              <a:extLst>
+                <a:ext uri="{96DAC541-7B7A-43D3-8B79-37D633B846F1}">
+                  <asvg:svgBlip xmlns:asvg="http://schemas.microsoft.com/office/drawing/2016/SVG/main" r:embed="rId19"/>
+                </a:ext>
+              </a:extLst>
+            </a:blip>
+            <a:stretch>
+              <a:fillRect/>
+            </a:stretch>
+          </p:blipFill>
+          <p:spPr>
+            <a:xfrm rot="20686004">
+              <a:off x="7138098" y="2444213"/>
+              <a:ext cx="1435304" cy="427831"/>
+            </a:xfrm>
+            <a:prstGeom prst="rect">
+              <a:avLst/>
+            </a:prstGeom>
+          </p:spPr>
+        </p:pic>
       </p:grpSp>
     </p:spTree>
     <p:extLst>

--- a/docs/licenta/Prezentare_Licenta_2025_Horovei_Dumitru_10LF222.pptx
+++ b/docs/licenta/Prezentare_Licenta_2025_Horovei_Dumitru_10LF222.pptx
@@ -11,8 +11,7 @@
     <p:sldId id="260" r:id="rId5"/>
     <p:sldId id="259" r:id="rId6"/>
     <p:sldId id="262" r:id="rId7"/>
-    <p:sldId id="261" r:id="rId8"/>
-    <p:sldId id="263" r:id="rId9"/>
+    <p:sldId id="263" r:id="rId8"/>
   </p:sldIdLst>
   <p:sldSz cx="12192000" cy="6858000"/>
   <p:notesSz cx="6858000" cy="9144000"/>
@@ -266,7 +265,7 @@
           <a:p>
             <a:fld id="{F583E3AE-5185-4D7B-AD2A-E5BDF163BCCD}" type="datetimeFigureOut">
               <a:rPr lang="en-US" smtClean="0"/>
-              <a:t>6/15/2025</a:t>
+              <a:t>6/21/2025</a:t>
             </a:fld>
             <a:endParaRPr lang="en-US"/>
           </a:p>
@@ -464,7 +463,7 @@
           <a:p>
             <a:fld id="{F583E3AE-5185-4D7B-AD2A-E5BDF163BCCD}" type="datetimeFigureOut">
               <a:rPr lang="en-US" smtClean="0"/>
-              <a:t>6/15/2025</a:t>
+              <a:t>6/21/2025</a:t>
             </a:fld>
             <a:endParaRPr lang="en-US"/>
           </a:p>
@@ -672,7 +671,7 @@
           <a:p>
             <a:fld id="{F583E3AE-5185-4D7B-AD2A-E5BDF163BCCD}" type="datetimeFigureOut">
               <a:rPr lang="en-US" smtClean="0"/>
-              <a:t>6/15/2025</a:t>
+              <a:t>6/21/2025</a:t>
             </a:fld>
             <a:endParaRPr lang="en-US"/>
           </a:p>
@@ -870,7 +869,7 @@
           <a:p>
             <a:fld id="{F583E3AE-5185-4D7B-AD2A-E5BDF163BCCD}" type="datetimeFigureOut">
               <a:rPr lang="en-US" smtClean="0"/>
-              <a:t>6/15/2025</a:t>
+              <a:t>6/21/2025</a:t>
             </a:fld>
             <a:endParaRPr lang="en-US"/>
           </a:p>
@@ -1145,7 +1144,7 @@
           <a:p>
             <a:fld id="{F583E3AE-5185-4D7B-AD2A-E5BDF163BCCD}" type="datetimeFigureOut">
               <a:rPr lang="en-US" smtClean="0"/>
-              <a:t>6/15/2025</a:t>
+              <a:t>6/21/2025</a:t>
             </a:fld>
             <a:endParaRPr lang="en-US"/>
           </a:p>
@@ -1410,7 +1409,7 @@
           <a:p>
             <a:fld id="{F583E3AE-5185-4D7B-AD2A-E5BDF163BCCD}" type="datetimeFigureOut">
               <a:rPr lang="en-US" smtClean="0"/>
-              <a:t>6/15/2025</a:t>
+              <a:t>6/21/2025</a:t>
             </a:fld>
             <a:endParaRPr lang="en-US"/>
           </a:p>
@@ -1822,7 +1821,7 @@
           <a:p>
             <a:fld id="{F583E3AE-5185-4D7B-AD2A-E5BDF163BCCD}" type="datetimeFigureOut">
               <a:rPr lang="en-US" smtClean="0"/>
-              <a:t>6/15/2025</a:t>
+              <a:t>6/21/2025</a:t>
             </a:fld>
             <a:endParaRPr lang="en-US"/>
           </a:p>
@@ -1963,7 +1962,7 @@
           <a:p>
             <a:fld id="{F583E3AE-5185-4D7B-AD2A-E5BDF163BCCD}" type="datetimeFigureOut">
               <a:rPr lang="en-US" smtClean="0"/>
-              <a:t>6/15/2025</a:t>
+              <a:t>6/21/2025</a:t>
             </a:fld>
             <a:endParaRPr lang="en-US"/>
           </a:p>
@@ -2076,7 +2075,7 @@
           <a:p>
             <a:fld id="{F583E3AE-5185-4D7B-AD2A-E5BDF163BCCD}" type="datetimeFigureOut">
               <a:rPr lang="en-US" smtClean="0"/>
-              <a:t>6/15/2025</a:t>
+              <a:t>6/21/2025</a:t>
             </a:fld>
             <a:endParaRPr lang="en-US"/>
           </a:p>
@@ -2387,7 +2386,7 @@
           <a:p>
             <a:fld id="{F583E3AE-5185-4D7B-AD2A-E5BDF163BCCD}" type="datetimeFigureOut">
               <a:rPr lang="en-US" smtClean="0"/>
-              <a:t>6/15/2025</a:t>
+              <a:t>6/21/2025</a:t>
             </a:fld>
             <a:endParaRPr lang="en-US"/>
           </a:p>
@@ -2675,7 +2674,7 @@
           <a:p>
             <a:fld id="{F583E3AE-5185-4D7B-AD2A-E5BDF163BCCD}" type="datetimeFigureOut">
               <a:rPr lang="en-US" smtClean="0"/>
-              <a:t>6/15/2025</a:t>
+              <a:t>6/21/2025</a:t>
             </a:fld>
             <a:endParaRPr lang="en-US"/>
           </a:p>
@@ -2925,7 +2924,7 @@
           <a:p>
             <a:fld id="{F583E3AE-5185-4D7B-AD2A-E5BDF163BCCD}" type="datetimeFigureOut">
               <a:rPr lang="en-US" smtClean="0"/>
-              <a:t>6/15/2025</a:t>
+              <a:t>6/21/2025</a:t>
             </a:fld>
             <a:endParaRPr lang="en-US"/>
           </a:p>
@@ -3576,17 +3575,6 @@
                 <a:latin typeface="UT Sans Medium" panose="00000500000000000000" pitchFamily="2" charset="0"/>
               </a:rPr>
               <a:t>Concluzii și direcții viitoare</a:t>
-            </a:r>
-          </a:p>
-          <a:p>
-            <a:r>
-              <a:rPr lang="ro-RO" noProof="1">
-                <a:solidFill>
-                  <a:schemeClr val="bg1"/>
-                </a:solidFill>
-                <a:latin typeface="UT Sans Medium" panose="00000500000000000000" pitchFamily="2" charset="0"/>
-              </a:rPr>
-              <a:t>Q&amp;A</a:t>
             </a:r>
           </a:p>
           <a:p>
@@ -5210,318 +5198,6 @@
         <p:cNvPr id="1" name="">
           <a:extLst>
             <a:ext uri="{FF2B5EF4-FFF2-40B4-BE49-F238E27FC236}">
-              <a16:creationId xmlns:a16="http://schemas.microsoft.com/office/drawing/2014/main" id="{DD9F779E-39CE-BA5C-ED8F-D817C8591951}"/>
-            </a:ext>
-          </a:extLst>
-        </p:cNvPr>
-        <p:cNvGrpSpPr/>
-        <p:nvPr/>
-      </p:nvGrpSpPr>
-      <p:grpSpPr>
-        <a:xfrm>
-          <a:off x="0" y="0"/>
-          <a:ext cx="0" cy="0"/>
-          <a:chOff x="0" y="0"/>
-          <a:chExt cx="0" cy="0"/>
-        </a:xfrm>
-      </p:grpSpPr>
-      <p:sp>
-        <p:nvSpPr>
-          <p:cNvPr id="2" name="Title 1">
-            <a:extLst>
-              <a:ext uri="{FF2B5EF4-FFF2-40B4-BE49-F238E27FC236}">
-                <a16:creationId xmlns:a16="http://schemas.microsoft.com/office/drawing/2014/main" id="{58828F96-6411-B295-2871-3B22BED0945C}"/>
-              </a:ext>
-            </a:extLst>
-          </p:cNvPr>
-          <p:cNvSpPr>
-            <a:spLocks noGrp="1"/>
-          </p:cNvSpPr>
-          <p:nvPr>
-            <p:ph type="title"/>
-          </p:nvPr>
-        </p:nvSpPr>
-        <p:spPr>
-          <a:xfrm>
-            <a:off x="2173863" y="909212"/>
-            <a:ext cx="7146524" cy="3984931"/>
-          </a:xfrm>
-        </p:spPr>
-        <p:txBody>
-          <a:bodyPr>
-            <a:normAutofit/>
-          </a:bodyPr>
-          <a:lstStyle/>
-          <a:p>
-            <a:pPr algn="ctr"/>
-            <a:r>
-              <a:rPr lang="ro-RO" sz="16600" b="1" noProof="1">
-                <a:solidFill>
-                  <a:schemeClr val="bg1"/>
-                </a:solidFill>
-                <a:latin typeface="UT Sans Medium" panose="00000500000000000000" pitchFamily="2" charset="0"/>
-              </a:rPr>
-              <a:t>Q&amp;A</a:t>
-            </a:r>
-          </a:p>
-        </p:txBody>
-      </p:sp>
-      <p:sp>
-        <p:nvSpPr>
-          <p:cNvPr id="5" name="Subtitle 2">
-            <a:extLst>
-              <a:ext uri="{FF2B5EF4-FFF2-40B4-BE49-F238E27FC236}">
-                <a16:creationId xmlns:a16="http://schemas.microsoft.com/office/drawing/2014/main" id="{1FE61150-619B-B736-2C51-95AC9438DB29}"/>
-              </a:ext>
-            </a:extLst>
-          </p:cNvPr>
-          <p:cNvSpPr txBox="1">
-            <a:spLocks/>
-          </p:cNvSpPr>
-          <p:nvPr/>
-        </p:nvSpPr>
-        <p:spPr>
-          <a:xfrm>
-            <a:off x="563418" y="5098329"/>
-            <a:ext cx="9144000" cy="993053"/>
-          </a:xfrm>
-          <a:prstGeom prst="rect">
-            <a:avLst/>
-          </a:prstGeom>
-        </p:spPr>
-        <p:txBody>
-          <a:bodyPr vert="horz" lIns="91440" tIns="45720" rIns="91440" bIns="45720" rtlCol="0">
-            <a:normAutofit lnSpcReduction="10000"/>
-          </a:bodyPr>
-          <a:lstStyle>
-            <a:lvl1pPr marL="228600" indent="-228600" algn="l" defTabSz="914400" rtl="0" eaLnBrk="1" latinLnBrk="0" hangingPunct="1">
-              <a:lnSpc>
-                <a:spcPct val="90000"/>
-              </a:lnSpc>
-              <a:spcBef>
-                <a:spcPts val="1000"/>
-              </a:spcBef>
-              <a:buFont typeface="Arial" panose="020B0604020202020204" pitchFamily="34" charset="0"/>
-              <a:buChar char="•"/>
-              <a:defRPr sz="2800" kern="1200">
-                <a:solidFill>
-                  <a:schemeClr val="tx1"/>
-                </a:solidFill>
-                <a:latin typeface="+mn-lt"/>
-                <a:ea typeface="+mn-ea"/>
-                <a:cs typeface="+mn-cs"/>
-              </a:defRPr>
-            </a:lvl1pPr>
-            <a:lvl2pPr marL="685800" indent="-228600" algn="l" defTabSz="914400" rtl="0" eaLnBrk="1" latinLnBrk="0" hangingPunct="1">
-              <a:lnSpc>
-                <a:spcPct val="90000"/>
-              </a:lnSpc>
-              <a:spcBef>
-                <a:spcPts val="500"/>
-              </a:spcBef>
-              <a:buFont typeface="Arial" panose="020B0604020202020204" pitchFamily="34" charset="0"/>
-              <a:buChar char="•"/>
-              <a:defRPr sz="2400" kern="1200">
-                <a:solidFill>
-                  <a:schemeClr val="tx1"/>
-                </a:solidFill>
-                <a:latin typeface="+mn-lt"/>
-                <a:ea typeface="+mn-ea"/>
-                <a:cs typeface="+mn-cs"/>
-              </a:defRPr>
-            </a:lvl2pPr>
-            <a:lvl3pPr marL="1143000" indent="-228600" algn="l" defTabSz="914400" rtl="0" eaLnBrk="1" latinLnBrk="0" hangingPunct="1">
-              <a:lnSpc>
-                <a:spcPct val="90000"/>
-              </a:lnSpc>
-              <a:spcBef>
-                <a:spcPts val="500"/>
-              </a:spcBef>
-              <a:buFont typeface="Arial" panose="020B0604020202020204" pitchFamily="34" charset="0"/>
-              <a:buChar char="•"/>
-              <a:defRPr sz="2000" kern="1200">
-                <a:solidFill>
-                  <a:schemeClr val="tx1"/>
-                </a:solidFill>
-                <a:latin typeface="+mn-lt"/>
-                <a:ea typeface="+mn-ea"/>
-                <a:cs typeface="+mn-cs"/>
-              </a:defRPr>
-            </a:lvl3pPr>
-            <a:lvl4pPr marL="1600200" indent="-228600" algn="l" defTabSz="914400" rtl="0" eaLnBrk="1" latinLnBrk="0" hangingPunct="1">
-              <a:lnSpc>
-                <a:spcPct val="90000"/>
-              </a:lnSpc>
-              <a:spcBef>
-                <a:spcPts val="500"/>
-              </a:spcBef>
-              <a:buFont typeface="Arial" panose="020B0604020202020204" pitchFamily="34" charset="0"/>
-              <a:buChar char="•"/>
-              <a:defRPr sz="1800" kern="1200">
-                <a:solidFill>
-                  <a:schemeClr val="tx1"/>
-                </a:solidFill>
-                <a:latin typeface="+mn-lt"/>
-                <a:ea typeface="+mn-ea"/>
-                <a:cs typeface="+mn-cs"/>
-              </a:defRPr>
-            </a:lvl4pPr>
-            <a:lvl5pPr marL="2057400" indent="-228600" algn="l" defTabSz="914400" rtl="0" eaLnBrk="1" latinLnBrk="0" hangingPunct="1">
-              <a:lnSpc>
-                <a:spcPct val="90000"/>
-              </a:lnSpc>
-              <a:spcBef>
-                <a:spcPts val="500"/>
-              </a:spcBef>
-              <a:buFont typeface="Arial" panose="020B0604020202020204" pitchFamily="34" charset="0"/>
-              <a:buChar char="•"/>
-              <a:defRPr sz="1800" kern="1200">
-                <a:solidFill>
-                  <a:schemeClr val="tx1"/>
-                </a:solidFill>
-                <a:latin typeface="+mn-lt"/>
-                <a:ea typeface="+mn-ea"/>
-                <a:cs typeface="+mn-cs"/>
-              </a:defRPr>
-            </a:lvl5pPr>
-            <a:lvl6pPr marL="2514600" indent="-228600" algn="l" defTabSz="914400" rtl="0" eaLnBrk="1" latinLnBrk="0" hangingPunct="1">
-              <a:lnSpc>
-                <a:spcPct val="90000"/>
-              </a:lnSpc>
-              <a:spcBef>
-                <a:spcPts val="500"/>
-              </a:spcBef>
-              <a:buFont typeface="Arial" panose="020B0604020202020204" pitchFamily="34" charset="0"/>
-              <a:buChar char="•"/>
-              <a:defRPr sz="1800" kern="1200">
-                <a:solidFill>
-                  <a:schemeClr val="tx1"/>
-                </a:solidFill>
-                <a:latin typeface="+mn-lt"/>
-                <a:ea typeface="+mn-ea"/>
-                <a:cs typeface="+mn-cs"/>
-              </a:defRPr>
-            </a:lvl6pPr>
-            <a:lvl7pPr marL="2971800" indent="-228600" algn="l" defTabSz="914400" rtl="0" eaLnBrk="1" latinLnBrk="0" hangingPunct="1">
-              <a:lnSpc>
-                <a:spcPct val="90000"/>
-              </a:lnSpc>
-              <a:spcBef>
-                <a:spcPts val="500"/>
-              </a:spcBef>
-              <a:buFont typeface="Arial" panose="020B0604020202020204" pitchFamily="34" charset="0"/>
-              <a:buChar char="•"/>
-              <a:defRPr sz="1800" kern="1200">
-                <a:solidFill>
-                  <a:schemeClr val="tx1"/>
-                </a:solidFill>
-                <a:latin typeface="+mn-lt"/>
-                <a:ea typeface="+mn-ea"/>
-                <a:cs typeface="+mn-cs"/>
-              </a:defRPr>
-            </a:lvl7pPr>
-            <a:lvl8pPr marL="3429000" indent="-228600" algn="l" defTabSz="914400" rtl="0" eaLnBrk="1" latinLnBrk="0" hangingPunct="1">
-              <a:lnSpc>
-                <a:spcPct val="90000"/>
-              </a:lnSpc>
-              <a:spcBef>
-                <a:spcPts val="500"/>
-              </a:spcBef>
-              <a:buFont typeface="Arial" panose="020B0604020202020204" pitchFamily="34" charset="0"/>
-              <a:buChar char="•"/>
-              <a:defRPr sz="1800" kern="1200">
-                <a:solidFill>
-                  <a:schemeClr val="tx1"/>
-                </a:solidFill>
-                <a:latin typeface="+mn-lt"/>
-                <a:ea typeface="+mn-ea"/>
-                <a:cs typeface="+mn-cs"/>
-              </a:defRPr>
-            </a:lvl8pPr>
-            <a:lvl9pPr marL="3886200" indent="-228600" algn="l" defTabSz="914400" rtl="0" eaLnBrk="1" latinLnBrk="0" hangingPunct="1">
-              <a:lnSpc>
-                <a:spcPct val="90000"/>
-              </a:lnSpc>
-              <a:spcBef>
-                <a:spcPts val="500"/>
-              </a:spcBef>
-              <a:buFont typeface="Arial" panose="020B0604020202020204" pitchFamily="34" charset="0"/>
-              <a:buChar char="•"/>
-              <a:defRPr sz="1800" kern="1200">
-                <a:solidFill>
-                  <a:schemeClr val="tx1"/>
-                </a:solidFill>
-                <a:latin typeface="+mn-lt"/>
-                <a:ea typeface="+mn-ea"/>
-                <a:cs typeface="+mn-cs"/>
-              </a:defRPr>
-            </a:lvl9pPr>
-          </a:lstStyle>
-          <a:p>
-            <a:pPr algn="just"/>
-            <a:r>
-              <a:rPr lang="ro-RO" b="1" noProof="1">
-                <a:solidFill>
-                  <a:schemeClr val="bg1"/>
-                </a:solidFill>
-                <a:latin typeface="UT Sans Medium" panose="00000500000000000000" pitchFamily="2" charset="0"/>
-              </a:rPr>
-              <a:t>Student</a:t>
-            </a:r>
-            <a:r>
-              <a:rPr lang="ro-RO" noProof="1">
-                <a:solidFill>
-                  <a:schemeClr val="bg1"/>
-                </a:solidFill>
-                <a:latin typeface="UT Sans Medium" panose="00000500000000000000" pitchFamily="2" charset="0"/>
-              </a:rPr>
-              <a:t>: Horovei Dumitru</a:t>
-            </a:r>
-          </a:p>
-          <a:p>
-            <a:pPr algn="just"/>
-            <a:r>
-              <a:rPr lang="ro-RO" b="1" noProof="1">
-                <a:solidFill>
-                  <a:schemeClr val="bg1"/>
-                </a:solidFill>
-                <a:latin typeface="UT Sans Medium" panose="00000500000000000000" pitchFamily="2" charset="0"/>
-              </a:rPr>
-              <a:t>Coordonator</a:t>
-            </a:r>
-            <a:r>
-              <a:rPr lang="ro-RO" noProof="1">
-                <a:solidFill>
-                  <a:schemeClr val="bg1"/>
-                </a:solidFill>
-                <a:latin typeface="UT Sans Medium" panose="00000500000000000000" pitchFamily="2" charset="0"/>
-              </a:rPr>
-              <a:t>: Prof. Dr. Deaconu Adrian-Marius</a:t>
-            </a:r>
-          </a:p>
-        </p:txBody>
-      </p:sp>
-    </p:spTree>
-    <p:extLst>
-      <p:ext uri="{BB962C8B-B14F-4D97-AF65-F5344CB8AC3E}">
-        <p14:creationId xmlns:p14="http://schemas.microsoft.com/office/powerpoint/2010/main" val="4210736699"/>
-      </p:ext>
-    </p:extLst>
-  </p:cSld>
-  <p:clrMapOvr>
-    <a:masterClrMapping/>
-  </p:clrMapOvr>
-</p:sld>
-</file>
-
-<file path=ppt/slides/slide8.xml><?xml version="1.0" encoding="utf-8"?>
-<p:sld xmlns:a="http://schemas.openxmlformats.org/drawingml/2006/main" xmlns:r="http://schemas.openxmlformats.org/officeDocument/2006/relationships" xmlns:p="http://schemas.openxmlformats.org/presentationml/2006/main">
-  <p:cSld>
-    <p:spTree>
-      <p:nvGrpSpPr>
-        <p:cNvPr id="1" name="">
-          <a:extLst>
-            <a:ext uri="{FF2B5EF4-FFF2-40B4-BE49-F238E27FC236}">
               <a16:creationId xmlns:a16="http://schemas.microsoft.com/office/drawing/2014/main" id="{20BBFF95-5804-FC7F-53D2-BBFC6E75478E}"/>
             </a:ext>
           </a:extLst>
